--- a/판매용_템플릿/_판매팩/LMS_프리미엄/06_메뉴구조.pptx
+++ b/판매용_템플릿/_판매팩/LMS_프리미엄/06_메뉴구조.pptx
@@ -948,7 +948,7 @@
             </a:avLst>
           </a:prstGeom>
           <a:solidFill>
-            <a:srgbClr val="E4762C"/>
+            <a:srgbClr val="BC5918"/>
           </a:solidFill>
           <a:ln/>
         </p:spPr>
@@ -1190,7 +1190,7 @@
             </a:avLst>
           </a:prstGeom>
           <a:solidFill>
-            <a:srgbClr val="E4762C"/>
+            <a:srgbClr val="BC5918"/>
           </a:solidFill>
           <a:ln/>
         </p:spPr>
@@ -1516,7 +1516,7 @@
             </a:avLst>
           </a:prstGeom>
           <a:solidFill>
-            <a:srgbClr val="E4762C"/>
+            <a:srgbClr val="BC5918"/>
           </a:solidFill>
           <a:ln/>
         </p:spPr>
@@ -2094,7 +2094,7 @@
             </a:avLst>
           </a:prstGeom>
           <a:solidFill>
-            <a:srgbClr val="E4762C"/>
+            <a:srgbClr val="BC5918"/>
           </a:solidFill>
           <a:ln/>
         </p:spPr>
@@ -2840,7 +2840,7 @@
             </a:avLst>
           </a:prstGeom>
           <a:solidFill>
-            <a:srgbClr val="E4762C"/>
+            <a:srgbClr val="BC5918"/>
           </a:solidFill>
           <a:ln/>
         </p:spPr>
@@ -3418,7 +3418,7 @@
             </a:avLst>
           </a:prstGeom>
           <a:solidFill>
-            <a:srgbClr val="E4762C"/>
+            <a:srgbClr val="BC5918"/>
           </a:solidFill>
           <a:ln/>
         </p:spPr>
@@ -3912,7 +3912,7 @@
             </a:avLst>
           </a:prstGeom>
           <a:solidFill>
-            <a:srgbClr val="E4762C"/>
+            <a:srgbClr val="BC5918"/>
           </a:solidFill>
           <a:ln/>
         </p:spPr>
@@ -4406,7 +4406,7 @@
             </a:avLst>
           </a:prstGeom>
           <a:solidFill>
-            <a:srgbClr val="E4762C"/>
+            <a:srgbClr val="BC5918"/>
           </a:solidFill>
           <a:ln/>
         </p:spPr>
@@ -4816,7 +4816,7 @@
             </a:avLst>
           </a:prstGeom>
           <a:solidFill>
-            <a:srgbClr val="E4762C"/>
+            <a:srgbClr val="BC5918"/>
           </a:solidFill>
           <a:ln/>
         </p:spPr>
